--- a/decks/lab-meeting-2026-05-14.pptx
+++ b/decks/lab-meeting-2026-05-14.pptx
@@ -785,7 +785,7 @@
                 <a:ea typeface="+mn-ea"/>
                 <a:cs typeface="+mn-cs"/>
               </a:rPr>
-              <a:t> — EBI repository of curated SBML models.</a:t>
+              <a:t xml:space="preserve"> — EBI repository of curated SBML models.</a:t>
             </a:r>
           </a:p>
           <a:p>
@@ -823,7 +823,7 @@
                 <a:ea typeface="+mn-ea"/>
                 <a:cs typeface="+mn-cs"/>
               </a:rPr>
-              <a:t> — Covert Lab’s whole-cell E. coli model (Karr 2012 lineage; Macklin / SunScience2020).</a:t>
+              <a:t xml:space="preserve"> — Covert Lab’s whole-cell E. coli model (Karr 2012 lineage; Macklin / SunScience2020).</a:t>
             </a:r>
           </a:p>
           <a:p>
@@ -950,7 +950,7 @@
                 <a:ea typeface="+mn-ea"/>
                 <a:cs typeface="+mn-cs"/>
               </a:rPr>
-              <a:t>Every numerical value carries a primary-source citation comment in the code. </a:t>
+              <a:t xml:space="preserve">Every numerical value carries a primary-source citation comment in the code. </a:t>
             </a:r>
           </a:p>
           <a:p>
@@ -964,7 +964,7 @@
                 <a:ea typeface="+mn-ea"/>
                 <a:cs typeface="+mn-cs"/>
               </a:rPr>
-              <a:t>This is the discipline that catches transcription errors (segues into slide 8). </a:t>
+              <a:t xml:space="preserve">This is the discipline that catches transcription errors (segues into slide 8). </a:t>
             </a:r>
           </a:p>
           <a:p>
@@ -1017,7 +1017,7 @@
                 <a:ea typeface="+mn-ea"/>
                 <a:cs typeface="+mn-cs"/>
               </a:rPr>
-              <a:t>•Anchor paper — the single paper whose experiment you’ll validate against; defines targets upfront.•IP3R — inositol-1,4,5-trisphosphate receptor; Ca2+release channel on the DTS.•SERCA — </a:t>
+              <a:t xml:space="preserve">•Anchor paper — the single paper whose experiment you’ll validate against; defines targets upfront.•IP3R — inositol-1,4,5-trisphosphate receptor; Ca2+release channel on the DTS.•SERCA — </a:t>
             </a:r>
             <a:r>
               <a:rPr lang="en-GB" sz="1200" b="0" i="0" kern="1200" dirty="0" err="1">
@@ -1308,7 +1308,7 @@
                 <a:ea typeface="+mn-ea"/>
                 <a:cs typeface="+mn-cs"/>
               </a:rPr>
-              <a:t>•Authorship of the model – primary source / </a:t>
+              <a:t xml:space="preserve">•Authorship of the model – primary source / </a:t>
             </a:r>
             <a:r>
               <a:rPr lang="en-GB" sz="1200" b="0" i="0" kern="1200" dirty="0" err="1">
@@ -1332,7 +1332,7 @@
                 <a:ea typeface="+mn-ea"/>
                 <a:cs typeface="+mn-cs"/>
               </a:rPr>
-              <a:t> / me, in that order</a:t>
+              <a:t xml:space="preserve"> / me, in that order</a:t>
             </a:r>
           </a:p>
           <a:p>
@@ -1460,7 +1460,7 @@
                 <a:ea typeface="+mn-ea"/>
                 <a:cs typeface="+mn-cs"/>
               </a:rPr>
-              <a:t>“building the code” means: scaffolding new process modules off the </a:t>
+              <a:t xml:space="preserve">“building the code” means: scaffolding new process modules off the </a:t>
             </a:r>
             <a:r>
               <a:rPr lang="en-GB" sz="1200" b="0" i="0" kern="1200" dirty="0" err="1">
@@ -1484,7 +1484,7 @@
                 <a:ea typeface="+mn-ea"/>
                 <a:cs typeface="+mn-cs"/>
               </a:rPr>
-              <a:t> template, wiring rate constants into the existing solver, writing unit tests for invariants.</a:t>
+              <a:t xml:space="preserve"> template, wiring rate constants into the existing solver, writing unit tests for invariants.</a:t>
             </a:r>
           </a:p>
           <a:p>
@@ -1692,7 +1692,7 @@
                 <a:ea typeface="+mn-ea"/>
                 <a:cs typeface="+mn-cs"/>
               </a:rPr>
-              <a:t>•CALR / </a:t>
+              <a:t xml:space="preserve">•CALR / </a:t>
             </a:r>
             <a:r>
               <a:rPr lang="en-GB" sz="1200" b="0" i="0" kern="1200" dirty="0" err="1">
@@ -1716,7 +1716,7 @@
                 <a:ea typeface="+mn-ea"/>
                 <a:cs typeface="+mn-cs"/>
               </a:rPr>
-              <a:t> / HSP90B1 / CREC — major intra-DTS Ca2+-binding buffers.</a:t>
+              <a:t xml:space="preserve"> / HSP90B1 / CREC — major intra-DTS Ca2+-binding buffers.</a:t>
             </a:r>
           </a:p>
           <a:p>
@@ -1882,7 +1882,7 @@
                 <a:ea typeface="+mn-ea"/>
                 <a:cs typeface="+mn-cs"/>
               </a:rPr>
-              <a:t>Resting state targets — cytosolic Ca2+in 90–110 </a:t>
+              <a:t xml:space="preserve">Resting state targets — cytosolic Ca2+in 90–110 </a:t>
             </a:r>
             <a:r>
               <a:rPr lang="en-GB" sz="1200" b="0" i="0" kern="1200" dirty="0" err="1">
@@ -1906,7 +1906,7 @@
                 <a:ea typeface="+mn-ea"/>
                 <a:cs typeface="+mn-cs"/>
               </a:rPr>
-              <a:t>; DTS Ca2+in literature range (100–400 </a:t>
+              <a:t xml:space="preserve">; DTS Ca2+in literature range (100–400 </a:t>
             </a:r>
             <a:r>
               <a:rPr lang="en-GB" sz="1200" b="0" i="0" kern="1200" dirty="0" err="1">
@@ -1930,7 +1930,7 @@
                 <a:ea typeface="+mn-ea"/>
                 <a:cs typeface="+mn-cs"/>
               </a:rPr>
-              <a:t>);IP3≈50 </a:t>
+              <a:t xml:space="preserve">);IP3≈50 </a:t>
             </a:r>
             <a:r>
               <a:rPr lang="en-GB" sz="1200" b="0" i="0" kern="1200" dirty="0" err="1">
@@ -1979,7 +1979,7 @@
                 <a:ea typeface="+mn-ea"/>
                 <a:cs typeface="+mn-cs"/>
               </a:rPr>
-              <a:t>Gαq-active — fraction of Gαq protein in its GTP-bound, active conformation; an upstream </a:t>
+              <a:t xml:space="preserve">Gαq-active — fraction of Gαq protein in its GTP-bound, active conformation; an upstream </a:t>
             </a:r>
             <a:r>
               <a:rPr lang="en-GB" sz="1200" b="0" i="0" kern="1200" dirty="0" err="1">
@@ -2003,7 +2003,7 @@
                 <a:ea typeface="+mn-ea"/>
                 <a:cs typeface="+mn-cs"/>
               </a:rPr>
-              <a:t> receptor </a:t>
+              <a:t xml:space="preserve"> receptor </a:t>
             </a:r>
             <a:r>
               <a:rPr lang="en-GB" sz="1200" b="0" i="0" kern="1200" dirty="0" err="1">
@@ -2027,7 +2027,7 @@
                 <a:ea typeface="+mn-ea"/>
                 <a:cs typeface="+mn-cs"/>
               </a:rPr>
-              <a:t> test — automated invariant check (e.g. mass balance, positivity, sub-state sum)</a:t>
+              <a:t xml:space="preserve"> test — automated invariant check (e.g. mass balance, positivity, sub-state sum)</a:t>
             </a:r>
             <a:endParaRPr lang="en-GB" dirty="0"/>
           </a:p>
@@ -4449,6 +4449,30 @@
           </a:p>
         </p:txBody>
       </p:sp>
+      <p:pic>
+        <p:nvPicPr>
+          <p:cNvPr id="20" name="University of Reading Arms"/>
+          <p:cNvPicPr>
+            <a:picLocks noChangeAspect="1"/>
+          </p:cNvPicPr>
+          <p:nvPr/>
+        </p:nvPicPr>
+        <p:blipFill>
+          <a:blip r:embed="rId3"/>
+          <a:stretch>
+            <a:fillRect/>
+          </a:stretch>
+        </p:blipFill>
+        <p:spPr>
+          <a:xfrm>
+            <a:off x="10603707" y="457200"/>
+            <a:ext cx="1131093" cy="1372200"/>
+          </a:xfrm>
+          <a:prstGeom prst="rect">
+            <a:avLst/>
+          </a:prstGeom>
+        </p:spPr>
+      </p:pic>
     </p:spTree>
   </p:cSld>
   <p:clrMapOvr>
@@ -4895,7 +4919,7 @@
             </a:pPr>
             <a:r>
               <a:rPr lang="en-GB" noProof="1"/>
-              <a:t>I’d like to get to a point where a biologist with limited coding experience could build a model with AI help. </a:t>
+              <a:t xml:space="preserve">I’d like to get to a point where a biologist with limited coding experience could build a model with AI help. </a:t>
             </a:r>
             <a:r>
               <a:rPr lang="en-GB" i="1" noProof="1"/>
@@ -5093,7 +5117,7 @@
           <a:p>
             <a:r>
               <a:rPr lang="en-GB" noProof="1"/>
-              <a:t>Pruned all </a:t>
+              <a:t xml:space="preserve">Pruned all </a:t>
             </a:r>
             <a:r>
               <a:rPr lang="en-GB" i="1" u="sng" noProof="1"/>
@@ -5101,7 +5125,7 @@
             </a:r>
             <a:r>
               <a:rPr lang="en-GB" noProof="1"/>
-              <a:t> biology.</a:t>
+              <a:t xml:space="preserve"> biology.</a:t>
             </a:r>
           </a:p>
           <a:p>
@@ -5119,7 +5143,7 @@
           <a:p>
             <a:r>
               <a:rPr lang="en-GB" noProof="1"/>
-              <a:t>Kept the simulation engine, state partitioning, listener / analysis framework </a:t>
+              <a:t xml:space="preserve">Kept the simulation engine, state partitioning, listener / analysis framework </a:t>
             </a:r>
           </a:p>
           <a:p>
@@ -5884,7 +5908,7 @@
                 <a:latin typeface="Source Serif 4 Medium" panose="02040603050405020204" pitchFamily="18" charset="0"/>
                 <a:ea typeface="Source Serif 4 Medium" panose="02040603050405020204" pitchFamily="18" charset="0"/>
               </a:rPr>
-              <a:t>The code works well, the architecture is not perfect, needs some work to make it more usable </a:t>
+              <a:t xml:space="preserve">The code works well, the architecture is not perfect, needs some work to make it more usable </a:t>
             </a:r>
           </a:p>
           <a:p>
@@ -6168,7 +6192,7 @@
           <a:p>
             <a:r>
               <a:rPr lang="en-GB" i="0" noProof="1"/>
-              <a:t> </a:t>
+              <a:t xml:space="preserve"> </a:t>
             </a:r>
           </a:p>
           <a:p>
@@ -6192,7 +6216,7 @@
           <a:p>
             <a:r>
               <a:rPr lang="en-GB" i="0" noProof="1"/>
-              <a:t>Very strong use-case for AI – tracking values and assertions across papers. It is also very useful for helping to review data – I got the AI to print the values it found, with reference to the primary source and the code so I could easily review. </a:t>
+              <a:t xml:space="preserve">Very strong use-case for AI – tracking values and assertions across papers. It is also very useful for helping to review data – I got the AI to print the values it found, with reference to the primary source and the code so I could easily review. </a:t>
             </a:r>
           </a:p>
         </p:txBody>
